--- a/VOIS_Major_Project_PPT.pptx
+++ b/VOIS_Major_Project_PPT.pptx
@@ -15371,6 +15371,73 @@
           </a:p>
         </p:txBody>
       </p:sp>
+      <p:sp>
+        <p:nvSpPr>
+          <p:cNvPr id="3" name="TextBox 2">
+            <a:extLst>
+              <a:ext uri="{FF2B5EF4-FFF2-40B4-BE49-F238E27FC236}">
+                <a16:creationId xmlns:a16="http://schemas.microsoft.com/office/drawing/2014/main" id="{46AE40C0-DDFB-EB26-5A7B-424AEBFE7A03}"/>
+              </a:ext>
+            </a:extLst>
+          </p:cNvPr>
+          <p:cNvSpPr txBox="1"/>
+          <p:nvPr/>
+        </p:nvSpPr>
+        <p:spPr>
+          <a:xfrm>
+            <a:off x="1033819" y="1905171"/>
+            <a:ext cx="8546910" cy="954107"/>
+          </a:xfrm>
+          <a:prstGeom prst="rect">
+            <a:avLst/>
+          </a:prstGeom>
+          <a:noFill/>
+        </p:spPr>
+        <p:txBody>
+          <a:bodyPr wrap="square">
+            <a:spAutoFit/>
+          </a:bodyPr>
+          <a:lstStyle/>
+          <a:p>
+            <a:r>
+              <a:rPr lang="en-IN" sz="2800" dirty="0"/>
+              <a:t>https://github.com/rukeshsg/seasonal-agriculture-performance-analysis</a:t>
+            </a:r>
+          </a:p>
+        </p:txBody>
+      </p:sp>
+      <p:pic>
+        <p:nvPicPr>
+          <p:cNvPr id="6" name="Picture 5" descr="How do I copy a GitHub link? Your Comprehensive Guide - SourceBae">
+            <a:hlinkClick r:id="rId3"/>
+            <a:extLst>
+              <a:ext uri="{FF2B5EF4-FFF2-40B4-BE49-F238E27FC236}">
+                <a16:creationId xmlns:a16="http://schemas.microsoft.com/office/drawing/2014/main" id="{AD9B8705-8F40-04B4-9813-14605C9968FF}"/>
+              </a:ext>
+            </a:extLst>
+          </p:cNvPr>
+          <p:cNvPicPr>
+            <a:picLocks noChangeAspect="1"/>
+          </p:cNvPicPr>
+          <p:nvPr/>
+        </p:nvPicPr>
+        <p:blipFill>
+          <a:blip r:embed="rId4"/>
+          <a:srcRect t="22499" b="26561"/>
+          <a:stretch>
+            <a:fillRect/>
+          </a:stretch>
+        </p:blipFill>
+        <p:spPr>
+          <a:xfrm>
+            <a:off x="1303754" y="3216545"/>
+            <a:ext cx="5956855" cy="1706874"/>
+          </a:xfrm>
+          <a:prstGeom prst="rect">
+            <a:avLst/>
+          </a:prstGeom>
+        </p:spPr>
+      </p:pic>
     </p:spTree>
     <p:extLst>
       <p:ext uri="{BB962C8B-B14F-4D97-AF65-F5344CB8AC3E}">
@@ -30548,24 +30615,6 @@
 </file>
 
 <file path=customXml/item1.xml><?xml version="1.0" encoding="utf-8"?>
-<p:properties xmlns:p="http://schemas.microsoft.com/office/2006/metadata/properties" xmlns:xsi="http://www.w3.org/2001/XMLSchema-instance" xmlns:pc="http://schemas.microsoft.com/office/infopath/2007/PartnerControls">
-  <documentManagement>
-    <Status xmlns="71af3243-3dd4-4a8d-8c0d-dd76da1f02a5">Not started</Status>
-    <MediaServiceKeyPoints xmlns="71af3243-3dd4-4a8d-8c0d-dd76da1f02a5" xsi:nil="true"/>
-  </documentManagement>
-</p:properties>
-</file>
-
-<file path=customXml/item2.xml><?xml version="1.0" encoding="utf-8"?>
-<?mso-contentType ?>
-<FormTemplates xmlns="http://schemas.microsoft.com/sharepoint/v3/contenttype/forms">
-  <Display>DocumentLibraryForm</Display>
-  <Edit>DocumentLibraryForm</Edit>
-  <New>DocumentLibraryForm</New>
-</FormTemplates>
-</file>
-
-<file path=customXml/item3.xml><?xml version="1.0" encoding="utf-8"?>
 <ct:contentTypeSchema xmlns:ct="http://schemas.microsoft.com/office/2006/metadata/contentType" xmlns:ma="http://schemas.microsoft.com/office/2006/metadata/properties/metaAttributes" ct:_="" ma:_="" ma:contentTypeName="Document" ma:contentTypeID="0x01010079F111ED35F8CC479449609E8A0923A6" ma:contentTypeVersion="12" ma:contentTypeDescription="Create a new document." ma:contentTypeScope="" ma:versionID="426e97fa315356fffbdcd9876fe988c2">
   <xsd:schema xmlns:xsd="http://www.w3.org/2001/XMLSchema" xmlns:xs="http://www.w3.org/2001/XMLSchema" xmlns:p="http://schemas.microsoft.com/office/2006/metadata/properties" xmlns:ns2="71af3243-3dd4-4a8d-8c0d-dd76da1f02a5" xmlns:ns3="16c05727-aa75-4e4a-9b5f-8a80a1165891" targetNamespace="http://schemas.microsoft.com/office/2006/metadata/properties" ma:root="true" ma:fieldsID="14b8f0def80e6d70ce3def20c90759ae" ns2:_="" ns3:_="">
     <xsd:import namespace="71af3243-3dd4-4a8d-8c0d-dd76da1f02a5"/>
@@ -30786,25 +30835,25 @@
 </ct:contentTypeSchema>
 </file>
 
-<file path=customXml/itemProps1.xml><?xml version="1.0" encoding="utf-8"?>
-<ds:datastoreItem xmlns:ds="http://schemas.openxmlformats.org/officeDocument/2006/customXml" ds:itemID="{4DEA9014-ED64-4558-B1E1-D03F0EE32BEB}">
-  <ds:schemaRefs>
-    <ds:schemaRef ds:uri="http://schemas.microsoft.com/office/2006/metadata/properties"/>
-    <ds:schemaRef ds:uri="http://schemas.microsoft.com/office/infopath/2007/PartnerControls"/>
-    <ds:schemaRef ds:uri="71af3243-3dd4-4a8d-8c0d-dd76da1f02a5"/>
-  </ds:schemaRefs>
-</ds:datastoreItem>
+<file path=customXml/item2.xml><?xml version="1.0" encoding="utf-8"?>
+<?mso-contentType ?>
+<FormTemplates xmlns="http://schemas.microsoft.com/sharepoint/v3/contenttype/forms">
+  <Display>DocumentLibraryForm</Display>
+  <Edit>DocumentLibraryForm</Edit>
+  <New>DocumentLibraryForm</New>
+</FormTemplates>
 </file>
 
-<file path=customXml/itemProps2.xml><?xml version="1.0" encoding="utf-8"?>
-<ds:datastoreItem xmlns:ds="http://schemas.openxmlformats.org/officeDocument/2006/customXml" ds:itemID="{05D99ABA-76CE-4A8E-B5F0-C051B96628DE}">
-  <ds:schemaRefs>
-    <ds:schemaRef ds:uri="http://schemas.microsoft.com/sharepoint/v3/contenttype/forms"/>
-  </ds:schemaRefs>
-</ds:datastoreItem>
+<file path=customXml/item3.xml><?xml version="1.0" encoding="utf-8"?>
+<p:properties xmlns:p="http://schemas.microsoft.com/office/2006/metadata/properties" xmlns:xsi="http://www.w3.org/2001/XMLSchema-instance" xmlns:pc="http://schemas.microsoft.com/office/infopath/2007/PartnerControls">
+  <documentManagement>
+    <Status xmlns="71af3243-3dd4-4a8d-8c0d-dd76da1f02a5">Not started</Status>
+    <MediaServiceKeyPoints xmlns="71af3243-3dd4-4a8d-8c0d-dd76da1f02a5" xsi:nil="true"/>
+  </documentManagement>
+</p:properties>
 </file>
 
-<file path=customXml/itemProps3.xml><?xml version="1.0" encoding="utf-8"?>
+<file path=customXml/itemProps1.xml><?xml version="1.0" encoding="utf-8"?>
 <ds:datastoreItem xmlns:ds="http://schemas.openxmlformats.org/officeDocument/2006/customXml" ds:itemID="{B19EB750-A6DA-4BE8-B87B-FC499FE73360}">
   <ds:schemaRefs>
     <ds:schemaRef ds:uri="http://schemas.microsoft.com/office/2006/metadata/contentType"/>
@@ -30821,4 +30870,22 @@
     <ds:schemaRef ds:uri="http://schemas.microsoft.com/internal/obd"/>
   </ds:schemaRefs>
 </ds:datastoreItem>
+</file>
+
+<file path=customXml/itemProps2.xml><?xml version="1.0" encoding="utf-8"?>
+<ds:datastoreItem xmlns:ds="http://schemas.openxmlformats.org/officeDocument/2006/customXml" ds:itemID="{05D99ABA-76CE-4A8E-B5F0-C051B96628DE}">
+  <ds:schemaRefs>
+    <ds:schemaRef ds:uri="http://schemas.microsoft.com/sharepoint/v3/contenttype/forms"/>
+  </ds:schemaRefs>
+</ds:datastoreItem>
+</file>
+
+<file path=customXml/itemProps3.xml><?xml version="1.0" encoding="utf-8"?>
+<ds:datastoreItem xmlns:ds="http://schemas.openxmlformats.org/officeDocument/2006/customXml" ds:itemID="{4DEA9014-ED64-4558-B1E1-D03F0EE32BEB}">
+  <ds:schemaRefs>
+    <ds:schemaRef ds:uri="http://schemas.microsoft.com/office/2006/metadata/properties"/>
+    <ds:schemaRef ds:uri="http://schemas.microsoft.com/office/infopath/2007/PartnerControls"/>
+    <ds:schemaRef ds:uri="71af3243-3dd4-4a8d-8c0d-dd76da1f02a5"/>
+  </ds:schemaRefs>
+</ds:datastoreItem>
 </file>